--- a/eventos/sap-bdc-innovation-day-2026/SAP_BDC_Kickoff_16h_2026-08-14.pptx
+++ b/eventos/sap-bdc-innovation-day-2026/SAP_BDC_Kickoff_16h_2026-08-14.pptx
@@ -13,6 +13,7 @@
     <p:sldId id="261" r:id="rId12"/>
     <p:sldId id="262" r:id="rId13"/>
     <p:sldId id="263" r:id="rId14"/>
+    <p:sldId id="264" r:id="rId15"/>
   </p:sldIdLst>
   <p:sldSz cx="12188952" cy="6858000" type="screen4x3"/>
   <p:notesSz cx="6858000" cy="9144000"/>
@@ -3842,7 +3843,7 @@
                   <a:srgbClr val="002F6C"/>
                 </a:solidFill>
               </a:rPr>
-              <a:t>Objetivo</a:t>
+              <a:t>Case de sucesso</a:t>
             </a:r>
           </a:p>
         </p:txBody>
@@ -3856,6 +3857,142 @@
         <p:spPr>
           <a:xfrm>
             <a:off x="2468880" y="3840480"/>
+            <a:ext cx="8686800" cy="640080"/>
+          </a:xfrm>
+          <a:prstGeom prst="rect">
+            <a:avLst/>
+          </a:prstGeom>
+          <a:noFill/>
+        </p:spPr>
+        <p:txBody>
+          <a:bodyPr wrap="square">
+            <a:spAutoFit/>
+          </a:bodyPr>
+          <a:lstStyle/>
+          <a:p>
+            <a:pPr algn="l"/>
+            <a:r>
+              <a:rPr sz="1400" b="0" i="0">
+                <a:solidFill>
+                  <a:srgbClr val="444444"/>
+                </a:solidFill>
+              </a:rPr>
+              <a:t>✅ SSA Alimentos — apresentado por Rodrigo Dumont</a:t>
+            </a:r>
+          </a:p>
+        </p:txBody>
+      </p:sp>
+      <p:sp>
+        <p:nvSpPr>
+          <p:cNvPr id="15" name="TextBox 14"/>
+          <p:cNvSpPr txBox="1"/>
+          <p:nvPr/>
+        </p:nvSpPr>
+        <p:spPr>
+          <a:xfrm>
+            <a:off x="457200" y="4663440"/>
+            <a:ext cx="1828800" cy="365760"/>
+          </a:xfrm>
+          <a:prstGeom prst="rect">
+            <a:avLst/>
+          </a:prstGeom>
+          <a:noFill/>
+        </p:spPr>
+        <p:txBody>
+          <a:bodyPr wrap="square">
+            <a:spAutoFit/>
+          </a:bodyPr>
+          <a:lstStyle/>
+          <a:p>
+            <a:pPr algn="l"/>
+            <a:r>
+              <a:rPr sz="1400" b="1" i="0">
+                <a:solidFill>
+                  <a:srgbClr val="002F6C"/>
+                </a:solidFill>
+              </a:rPr>
+              <a:t>Público-alvo</a:t>
+            </a:r>
+          </a:p>
+        </p:txBody>
+      </p:sp>
+      <p:sp>
+        <p:nvSpPr>
+          <p:cNvPr id="16" name="TextBox 15"/>
+          <p:cNvSpPr txBox="1"/>
+          <p:nvPr/>
+        </p:nvSpPr>
+        <p:spPr>
+          <a:xfrm>
+            <a:off x="2468880" y="4663440"/>
+            <a:ext cx="8686800" cy="640080"/>
+          </a:xfrm>
+          <a:prstGeom prst="rect">
+            <a:avLst/>
+          </a:prstGeom>
+          <a:noFill/>
+        </p:spPr>
+        <p:txBody>
+          <a:bodyPr wrap="square">
+            <a:spAutoFit/>
+          </a:bodyPr>
+          <a:lstStyle/>
+          <a:p>
+            <a:pPr algn="l"/>
+            <a:r>
+              <a:rPr sz="1400" b="0" i="0">
+                <a:solidFill>
+                  <a:srgbClr val="444444"/>
+                </a:solidFill>
+              </a:rPr>
+              <a:t>50/60 pessoas convidadas (considerando quebra)</a:t>
+            </a:r>
+          </a:p>
+        </p:txBody>
+      </p:sp>
+      <p:sp>
+        <p:nvSpPr>
+          <p:cNvPr id="17" name="TextBox 16"/>
+          <p:cNvSpPr txBox="1"/>
+          <p:nvPr/>
+        </p:nvSpPr>
+        <p:spPr>
+          <a:xfrm>
+            <a:off x="457200" y="5486400"/>
+            <a:ext cx="1828800" cy="365760"/>
+          </a:xfrm>
+          <a:prstGeom prst="rect">
+            <a:avLst/>
+          </a:prstGeom>
+          <a:noFill/>
+        </p:spPr>
+        <p:txBody>
+          <a:bodyPr wrap="square">
+            <a:spAutoFit/>
+          </a:bodyPr>
+          <a:lstStyle/>
+          <a:p>
+            <a:pPr algn="l"/>
+            <a:r>
+              <a:rPr sz="1400" b="1" i="0">
+                <a:solidFill>
+                  <a:srgbClr val="002F6C"/>
+                </a:solidFill>
+              </a:rPr>
+              <a:t>Objetivo</a:t>
+            </a:r>
+          </a:p>
+        </p:txBody>
+      </p:sp>
+      <p:sp>
+        <p:nvSpPr>
+          <p:cNvPr id="18" name="TextBox 17"/>
+          <p:cNvSpPr txBox="1"/>
+          <p:nvPr/>
+        </p:nvSpPr>
+        <p:spPr>
+          <a:xfrm>
+            <a:off x="2468880" y="5486400"/>
             <a:ext cx="8686800" cy="640080"/>
           </a:xfrm>
           <a:prstGeom prst="rect">
@@ -5118,7 +5255,7 @@
                   <a:srgbClr val="F5A800"/>
                 </a:solidFill>
               </a:rPr>
-              <a:t>3. STATUS</a:t>
+              <a:t>CONFIRMADO</a:t>
             </a:r>
           </a:p>
         </p:txBody>
@@ -5152,7 +5289,7 @@
                   <a:srgbClr val="002F6C"/>
                 </a:solidFill>
               </a:rPr>
-              <a:t>Onde Estamos</a:t>
+              <a:t>O Que Teremos</a:t>
             </a:r>
           </a:p>
         </p:txBody>
@@ -5202,6 +5339,338 @@
       </p:sp>
       <p:sp>
         <p:nvSpPr>
+          <p:cNvPr id="7" name="TextBox 6"/>
+          <p:cNvSpPr txBox="1"/>
+          <p:nvPr/>
+        </p:nvSpPr>
+        <p:spPr>
+          <a:xfrm>
+            <a:off x="548640" y="1463040"/>
+            <a:ext cx="9144000" cy="2743200"/>
+          </a:xfrm>
+          <a:prstGeom prst="rect">
+            <a:avLst/>
+          </a:prstGeom>
+          <a:noFill/>
+        </p:spPr>
+        <p:txBody>
+          <a:bodyPr wrap="square">
+            <a:spAutoFit/>
+          </a:bodyPr>
+          <a:lstStyle/>
+          <a:p>
+            <a:pPr>
+              <a:lnSpc>
+                <a:spcPct val="140000"/>
+              </a:lnSpc>
+            </a:pPr>
+            <a:r>
+              <a:rPr sz="1600">
+                <a:solidFill>
+                  <a:srgbClr val="444444"/>
+                </a:solidFill>
+              </a:rPr>
+              <a:t>•  Coffee</a:t>
+            </a:r>
+          </a:p>
+          <a:p>
+            <a:pPr>
+              <a:lnSpc>
+                <a:spcPct val="140000"/>
+              </a:lnSpc>
+            </a:pPr>
+            <a:r>
+              <a:rPr sz="1600">
+                <a:solidFill>
+                  <a:srgbClr val="444444"/>
+                </a:solidFill>
+              </a:rPr>
+              <a:t>•  Brindes</a:t>
+            </a:r>
+          </a:p>
+          <a:p>
+            <a:pPr>
+              <a:lnSpc>
+                <a:spcPct val="140000"/>
+              </a:lnSpc>
+            </a:pPr>
+            <a:r>
+              <a:rPr sz="1600">
+                <a:solidFill>
+                  <a:srgbClr val="444444"/>
+                </a:solidFill>
+              </a:rPr>
+              <a:t>•  Apresentação de case (SSA Alimentos)</a:t>
+            </a:r>
+          </a:p>
+          <a:p>
+            <a:pPr>
+              <a:lnSpc>
+                <a:spcPct val="140000"/>
+              </a:lnSpc>
+            </a:pPr>
+            <a:r>
+              <a:rPr sz="1600">
+                <a:solidFill>
+                  <a:srgbClr val="444444"/>
+                </a:solidFill>
+              </a:rPr>
+              <a:t>•  Pesquisa de engajamento</a:t>
+            </a:r>
+          </a:p>
+        </p:txBody>
+      </p:sp>
+      <p:sp>
+        <p:nvSpPr>
+          <p:cNvPr id="8" name="TextBox 7"/>
+          <p:cNvSpPr txBox="1"/>
+          <p:nvPr/>
+        </p:nvSpPr>
+        <p:spPr>
+          <a:xfrm>
+            <a:off x="548640" y="5029200"/>
+            <a:ext cx="9144000" cy="457200"/>
+          </a:xfrm>
+          <a:prstGeom prst="rect">
+            <a:avLst/>
+          </a:prstGeom>
+          <a:noFill/>
+        </p:spPr>
+        <p:txBody>
+          <a:bodyPr wrap="square">
+            <a:spAutoFit/>
+          </a:bodyPr>
+          <a:lstStyle/>
+          <a:p>
+            <a:pPr algn="l"/>
+            <a:r>
+              <a:rPr sz="1300" b="0" i="1">
+                <a:solidFill>
+                  <a:srgbClr val="996600"/>
+                </a:solidFill>
+              </a:rPr>
+              <a:t>*Inscrições até o momento: XX — atualizar na reunião</a:t>
+            </a:r>
+          </a:p>
+        </p:txBody>
+      </p:sp>
+    </p:spTree>
+  </p:cSld>
+  <p:clrMapOvr>
+    <a:masterClrMapping/>
+  </p:clrMapOvr>
+</p:sld>
+</file>
+
+<file path=ppt/slides/slide5.xml><?xml version="1.0" encoding="utf-8"?>
+<p:sld xmlns:a="http://schemas.openxmlformats.org/drawingml/2006/main" xmlns:p="http://schemas.openxmlformats.org/presentationml/2006/main" xmlns:r="http://schemas.openxmlformats.org/officeDocument/2006/relationships">
+  <p:cSld>
+    <p:spTree>
+      <p:nvGrpSpPr>
+        <p:cNvPr id="1" name=""/>
+        <p:cNvGrpSpPr/>
+        <p:nvPr/>
+      </p:nvGrpSpPr>
+      <p:grpSpPr/>
+      <p:sp>
+        <p:nvSpPr>
+          <p:cNvPr id="2" name="Rectangle 1"/>
+          <p:cNvSpPr/>
+          <p:nvPr/>
+        </p:nvSpPr>
+        <p:spPr>
+          <a:xfrm>
+            <a:off x="0" y="0"/>
+            <a:ext cx="12188952" cy="109728"/>
+          </a:xfrm>
+          <a:prstGeom prst="rect">
+            <a:avLst/>
+          </a:prstGeom>
+          <a:solidFill>
+            <a:srgbClr val="F5A800"/>
+          </a:solidFill>
+          <a:ln>
+            <a:noFill/>
+          </a:ln>
+        </p:spPr>
+        <p:style>
+          <a:lnRef idx="1">
+            <a:schemeClr val="accent1"/>
+          </a:lnRef>
+          <a:fillRef idx="3">
+            <a:schemeClr val="accent1"/>
+          </a:fillRef>
+          <a:effectRef idx="2">
+            <a:schemeClr val="accent1"/>
+          </a:effectRef>
+          <a:fontRef idx="minor">
+            <a:schemeClr val="lt1"/>
+          </a:fontRef>
+        </p:style>
+        <p:txBody>
+          <a:bodyPr rtlCol="0" anchor="ctr"/>
+          <a:lstStyle/>
+          <a:p>
+            <a:pPr algn="ctr"/>
+          </a:p>
+        </p:txBody>
+      </p:sp>
+      <p:sp>
+        <p:nvSpPr>
+          <p:cNvPr id="3" name="Rectangle 2"/>
+          <p:cNvSpPr/>
+          <p:nvPr/>
+        </p:nvSpPr>
+        <p:spPr>
+          <a:xfrm>
+            <a:off x="0" y="6748272"/>
+            <a:ext cx="12188952" cy="109728"/>
+          </a:xfrm>
+          <a:prstGeom prst="rect">
+            <a:avLst/>
+          </a:prstGeom>
+          <a:solidFill>
+            <a:srgbClr val="002F6C"/>
+          </a:solidFill>
+          <a:ln>
+            <a:noFill/>
+          </a:ln>
+        </p:spPr>
+        <p:style>
+          <a:lnRef idx="1">
+            <a:schemeClr val="accent1"/>
+          </a:lnRef>
+          <a:fillRef idx="3">
+            <a:schemeClr val="accent1"/>
+          </a:fillRef>
+          <a:effectRef idx="2">
+            <a:schemeClr val="accent1"/>
+          </a:effectRef>
+          <a:fontRef idx="minor">
+            <a:schemeClr val="lt1"/>
+          </a:fontRef>
+        </p:style>
+        <p:txBody>
+          <a:bodyPr rtlCol="0" anchor="ctr"/>
+          <a:lstStyle/>
+          <a:p>
+            <a:pPr algn="ctr"/>
+          </a:p>
+        </p:txBody>
+      </p:sp>
+      <p:sp>
+        <p:nvSpPr>
+          <p:cNvPr id="4" name="TextBox 3"/>
+          <p:cNvSpPr txBox="1"/>
+          <p:nvPr/>
+        </p:nvSpPr>
+        <p:spPr>
+          <a:xfrm>
+            <a:off x="457200" y="256032"/>
+            <a:ext cx="7315200" cy="365760"/>
+          </a:xfrm>
+          <a:prstGeom prst="rect">
+            <a:avLst/>
+          </a:prstGeom>
+          <a:noFill/>
+        </p:spPr>
+        <p:txBody>
+          <a:bodyPr wrap="square">
+            <a:spAutoFit/>
+          </a:bodyPr>
+          <a:lstStyle/>
+          <a:p>
+            <a:pPr algn="l"/>
+            <a:r>
+              <a:rPr sz="1300" b="1" i="0">
+                <a:solidFill>
+                  <a:srgbClr val="F5A800"/>
+                </a:solidFill>
+              </a:rPr>
+              <a:t>3. STATUS</a:t>
+            </a:r>
+          </a:p>
+        </p:txBody>
+      </p:sp>
+      <p:sp>
+        <p:nvSpPr>
+          <p:cNvPr id="5" name="TextBox 4"/>
+          <p:cNvSpPr txBox="1"/>
+          <p:nvPr/>
+        </p:nvSpPr>
+        <p:spPr>
+          <a:xfrm>
+            <a:off x="457200" y="548640"/>
+            <a:ext cx="9144000" cy="548640"/>
+          </a:xfrm>
+          <a:prstGeom prst="rect">
+            <a:avLst/>
+          </a:prstGeom>
+          <a:noFill/>
+        </p:spPr>
+        <p:txBody>
+          <a:bodyPr wrap="square">
+            <a:spAutoFit/>
+          </a:bodyPr>
+          <a:lstStyle/>
+          <a:p>
+            <a:pPr algn="l"/>
+            <a:r>
+              <a:rPr sz="2400" b="1" i="0">
+                <a:solidFill>
+                  <a:srgbClr val="002F6C"/>
+                </a:solidFill>
+              </a:rPr>
+              <a:t>Onde Estamos</a:t>
+            </a:r>
+          </a:p>
+        </p:txBody>
+      </p:sp>
+      <p:sp>
+        <p:nvSpPr>
+          <p:cNvPr id="6" name="Rectangle 5"/>
+          <p:cNvSpPr/>
+          <p:nvPr/>
+        </p:nvSpPr>
+        <p:spPr>
+          <a:xfrm>
+            <a:off x="457200" y="1051560"/>
+            <a:ext cx="2011680" cy="36576"/>
+          </a:xfrm>
+          <a:prstGeom prst="rect">
+            <a:avLst/>
+          </a:prstGeom>
+          <a:solidFill>
+            <a:srgbClr val="F5A800"/>
+          </a:solidFill>
+          <a:ln>
+            <a:noFill/>
+          </a:ln>
+        </p:spPr>
+        <p:style>
+          <a:lnRef idx="1">
+            <a:schemeClr val="accent1"/>
+          </a:lnRef>
+          <a:fillRef idx="3">
+            <a:schemeClr val="accent1"/>
+          </a:fillRef>
+          <a:effectRef idx="2">
+            <a:schemeClr val="accent1"/>
+          </a:effectRef>
+          <a:fontRef idx="minor">
+            <a:schemeClr val="lt1"/>
+          </a:fontRef>
+        </p:style>
+        <p:txBody>
+          <a:bodyPr rtlCol="0" anchor="ctr"/>
+          <a:lstStyle/>
+          <a:p>
+            <a:pPr algn="ctr"/>
+          </a:p>
+        </p:txBody>
+      </p:sp>
+      <p:sp>
+        <p:nvSpPr>
           <p:cNvPr id="7" name="Rectangle 6"/>
           <p:cNvSpPr/>
           <p:nvPr/>
@@ -5306,8 +5775,8 @@
                   <a:srgbClr val="444444"/>
                 </a:solidFill>
               </a:rPr>
-              <a:t>Hoje é 14/08 — evento em 12 dias. Divulgação e e-mails de convite já deveriam ter
-começado em 21/07 e 26/07. Estamos atrasados no funil — foco #1 da reunião.</a:t>
+              <a:t>Hoje é 14/08 — evento em 12 dias. Case e palestrantes já confirmados.
+Divulgação e e-mails de convite seguem atrasados — foco #1 da reunião.</a:t>
             </a:r>
           </a:p>
         </p:txBody>
@@ -5322,7 +5791,7 @@
         </p:nvGraphicFramePr>
         <p:xfrm>
           <a:off x="457200" y="2377440"/>
-          <a:ext cx="11064240" cy="4023360"/>
+          <a:ext cx="11064240" cy="4572000"/>
         </p:xfrm>
         <a:graphic>
           <a:graphicData uri="http://schemas.openxmlformats.org/drawingml/2006/table">
@@ -5332,17 +5801,17 @@
               </a:tblPr>
               <a:tblGrid>
                 <a:gridCol w="2926080"/>
-                <a:gridCol w="2743200"/>
-                <a:gridCol w="5394960"/>
+                <a:gridCol w="3200400"/>
+                <a:gridCol w="4937760"/>
               </a:tblGrid>
-              <a:tr h="502920">
+              <a:tr h="457200">
                 <a:tc>
                   <a:txBody>
                     <a:bodyPr/>
                     <a:lstStyle/>
                     <a:p>
                       <a:pPr>
-                        <a:defRPr sz="1200" b="1">
+                        <a:defRPr sz="1100" b="1">
                           <a:solidFill>
                             <a:srgbClr val="FFFFFF"/>
                           </a:solidFill>
@@ -5365,7 +5834,7 @@
                     <a:lstStyle/>
                     <a:p>
                       <a:pPr>
-                        <a:defRPr sz="1200" b="1">
+                        <a:defRPr sz="1100" b="1">
                           <a:solidFill>
                             <a:srgbClr val="FFFFFF"/>
                           </a:solidFill>
@@ -5388,7 +5857,7 @@
                     <a:lstStyle/>
                     <a:p>
                       <a:pPr>
-                        <a:defRPr sz="1200" b="1">
+                        <a:defRPr sz="1100" b="1">
                           <a:solidFill>
                             <a:srgbClr val="FFFFFF"/>
                           </a:solidFill>
@@ -5406,14 +5875,156 @@
                   </a:tcPr>
                 </a:tc>
               </a:tr>
-              <a:tr h="502920">
+              <a:tr h="457200">
                 <a:tc>
                   <a:txBody>
                     <a:bodyPr/>
                     <a:lstStyle/>
                     <a:p>
                       <a:pPr>
-                        <a:defRPr sz="1200">
+                        <a:defRPr sz="1100">
+                          <a:solidFill>
+                            <a:srgbClr val="444444"/>
+                          </a:solidFill>
+                        </a:defRPr>
+                      </a:pPr>
+                      <a:r>
+                        <a:t>Case de sucesso</a:t>
+                      </a:r>
+                    </a:p>
+                  </a:txBody>
+                  <a:tcPr>
+                    <a:solidFill>
+                      <a:srgbClr val="FFFFFF"/>
+                    </a:solidFill>
+                  </a:tcPr>
+                </a:tc>
+                <a:tc>
+                  <a:txBody>
+                    <a:bodyPr/>
+                    <a:lstStyle/>
+                    <a:p>
+                      <a:pPr>
+                        <a:defRPr sz="1100">
+                          <a:solidFill>
+                            <a:srgbClr val="444444"/>
+                          </a:solidFill>
+                        </a:defRPr>
+                      </a:pPr>
+                      <a:r>
+                        <a:t>✅ SSA Alimentos / Rodrigo Dumont</a:t>
+                      </a:r>
+                    </a:p>
+                  </a:txBody>
+                  <a:tcPr>
+                    <a:solidFill>
+                      <a:srgbClr val="FFFFFF"/>
+                    </a:solidFill>
+                  </a:tcPr>
+                </a:tc>
+                <a:tc>
+                  <a:txBody>
+                    <a:bodyPr/>
+                    <a:lstStyle/>
+                    <a:p>
+                      <a:pPr>
+                        <a:defRPr sz="1100">
+                          <a:solidFill>
+                            <a:srgbClr val="444444"/>
+                          </a:solidFill>
+                        </a:defRPr>
+                      </a:pPr>
+                      <a:r>
+                        <a:t>Alinhar roteiro do case</a:t>
+                      </a:r>
+                    </a:p>
+                  </a:txBody>
+                  <a:tcPr>
+                    <a:solidFill>
+                      <a:srgbClr val="FFFFFF"/>
+                    </a:solidFill>
+                  </a:tcPr>
+                </a:tc>
+              </a:tr>
+              <a:tr h="457200">
+                <a:tc>
+                  <a:txBody>
+                    <a:bodyPr/>
+                    <a:lstStyle/>
+                    <a:p>
+                      <a:pPr>
+                        <a:defRPr sz="1100">
+                          <a:solidFill>
+                            <a:srgbClr val="444444"/>
+                          </a:solidFill>
+                        </a:defRPr>
+                      </a:pPr>
+                      <a:r>
+                        <a:t>Palestrantes</a:t>
+                      </a:r>
+                    </a:p>
+                  </a:txBody>
+                  <a:tcPr>
+                    <a:solidFill>
+                      <a:srgbClr val="F4F4F4"/>
+                    </a:solidFill>
+                  </a:tcPr>
+                </a:tc>
+                <a:tc>
+                  <a:txBody>
+                    <a:bodyPr/>
+                    <a:lstStyle/>
+                    <a:p>
+                      <a:pPr>
+                        <a:defRPr sz="1100">
+                          <a:solidFill>
+                            <a:srgbClr val="444444"/>
+                          </a:solidFill>
+                        </a:defRPr>
+                      </a:pPr>
+                      <a:r>
+                        <a:t>✅ Junior Freitas, Andrey, André Ferreira</a:t>
+                      </a:r>
+                    </a:p>
+                  </a:txBody>
+                  <a:tcPr>
+                    <a:solidFill>
+                      <a:srgbClr val="F4F4F4"/>
+                    </a:solidFill>
+                  </a:tcPr>
+                </a:tc>
+                <a:tc>
+                  <a:txBody>
+                    <a:bodyPr/>
+                    <a:lstStyle/>
+                    <a:p>
+                      <a:pPr>
+                        <a:defRPr sz="1100">
+                          <a:solidFill>
+                            <a:srgbClr val="444444"/>
+                          </a:solidFill>
+                        </a:defRPr>
+                      </a:pPr>
+                      <a:r>
+                        <a:t>Alinhar conteúdo e tempo de fala</a:t>
+                      </a:r>
+                    </a:p>
+                  </a:txBody>
+                  <a:tcPr>
+                    <a:solidFill>
+                      <a:srgbClr val="F4F4F4"/>
+                    </a:solidFill>
+                  </a:tcPr>
+                </a:tc>
+              </a:tr>
+              <a:tr h="457200">
+                <a:tc>
+                  <a:txBody>
+                    <a:bodyPr/>
+                    <a:lstStyle/>
+                    <a:p>
+                      <a:pPr>
+                        <a:defRPr sz="1100">
                           <a:solidFill>
                             <a:srgbClr val="444444"/>
                           </a:solidFill>
@@ -5436,14 +6047,14 @@
                     <a:lstStyle/>
                     <a:p>
                       <a:pPr>
-                        <a:defRPr sz="1200">
+                        <a:defRPr sz="1100">
                           <a:solidFill>
                             <a:srgbClr val="444444"/>
                           </a:solidFill>
                         </a:defRPr>
                       </a:pPr>
                       <a:r>
-                        <a:t>Em branco</a:t>
+                        <a:t>Ajustada p/ 50/60 pessoas</a:t>
                       </a:r>
                     </a:p>
                   </a:txBody>
@@ -5459,14 +6070,14 @@
                     <a:lstStyle/>
                     <a:p>
                       <a:pPr>
-                        <a:defRPr sz="1200">
+                        <a:defRPr sz="1100">
                           <a:solidFill>
                             <a:srgbClr val="444444"/>
                           </a:solidFill>
                         </a:defRPr>
                       </a:pPr>
                       <a:r>
-                        <a:t>Fechar lista hoje</a:t>
+                        <a:t>Fechar lista final hoje/amanhã</a:t>
                       </a:r>
                     </a:p>
                   </a:txBody>
@@ -5477,21 +6088,21 @@
                   </a:tcPr>
                 </a:tc>
               </a:tr>
-              <a:tr h="502920">
+              <a:tr h="457200">
                 <a:tc>
                   <a:txBody>
                     <a:bodyPr/>
                     <a:lstStyle/>
                     <a:p>
                       <a:pPr>
-                        <a:defRPr sz="1200">
+                        <a:defRPr sz="1100">
                           <a:solidFill>
                             <a:srgbClr val="444444"/>
                           </a:solidFill>
                         </a:defRPr>
                       </a:pPr>
                       <a:r>
-                        <a:t>Case de sucesso</a:t>
+                        <a:t>Inscrições até agora</a:t>
                       </a:r>
                     </a:p>
                   </a:txBody>
@@ -5507,14 +6118,14 @@
                     <a:lstStyle/>
                     <a:p>
                       <a:pPr>
-                        <a:defRPr sz="1200">
+                        <a:defRPr sz="1100">
                           <a:solidFill>
                             <a:srgbClr val="444444"/>
                           </a:solidFill>
                         </a:defRPr>
                       </a:pPr>
                       <a:r>
-                        <a:t>Em validação</a:t>
+                        <a:t>Em aberto (XX)</a:t>
                       </a:r>
                     </a:p>
                   </a:txBody>
@@ -5530,14 +6141,14 @@
                     <a:lstStyle/>
                     <a:p>
                       <a:pPr>
-                        <a:defRPr sz="1200">
+                        <a:defRPr sz="1100">
                           <a:solidFill>
                             <a:srgbClr val="444444"/>
                           </a:solidFill>
                         </a:defRPr>
                       </a:pPr>
                       <a:r>
-                        <a:t>Confirmar cliente esta semana</a:t>
+                        <a:t>Levantar número atual</a:t>
                       </a:r>
                     </a:p>
                   </a:txBody>
@@ -5548,14 +6159,14 @@
                   </a:tcPr>
                 </a:tc>
               </a:tr>
-              <a:tr h="502920">
+              <a:tr h="457200">
                 <a:tc>
                   <a:txBody>
                     <a:bodyPr/>
                     <a:lstStyle/>
                     <a:p>
                       <a:pPr>
-                        <a:defRPr sz="1200">
+                        <a:defRPr sz="1100">
                           <a:solidFill>
                             <a:srgbClr val="444444"/>
                           </a:solidFill>
@@ -5578,7 +6189,7 @@
                     <a:lstStyle/>
                     <a:p>
                       <a:pPr>
-                        <a:defRPr sz="1200">
+                        <a:defRPr sz="1100">
                           <a:solidFill>
                             <a:srgbClr val="444444"/>
                           </a:solidFill>
@@ -5601,7 +6212,7 @@
                     <a:lstStyle/>
                     <a:p>
                       <a:pPr>
-                        <a:defRPr sz="1200">
+                        <a:defRPr sz="1100">
                           <a:solidFill>
                             <a:srgbClr val="444444"/>
                           </a:solidFill>
@@ -5619,14 +6230,14 @@
                   </a:tcPr>
                 </a:tc>
               </a:tr>
-              <a:tr h="502920">
+              <a:tr h="457200">
                 <a:tc>
                   <a:txBody>
                     <a:bodyPr/>
                     <a:lstStyle/>
                     <a:p>
                       <a:pPr>
-                        <a:defRPr sz="1200">
+                        <a:defRPr sz="1100">
                           <a:solidFill>
                             <a:srgbClr val="444444"/>
                           </a:solidFill>
@@ -5649,14 +6260,14 @@
                     <a:lstStyle/>
                     <a:p>
                       <a:pPr>
-                        <a:defRPr sz="1200">
+                        <a:defRPr sz="1100">
                           <a:solidFill>
                             <a:srgbClr val="444444"/>
                           </a:solidFill>
                         </a:defRPr>
                       </a:pPr>
                       <a:r>
-                        <a:t>2 disparos perdidos</a:t>
+                        <a:t>Cadência atrasada</a:t>
                       </a:r>
                     </a:p>
                   </a:txBody>
@@ -5672,14 +6283,14 @@
                     <a:lstStyle/>
                     <a:p>
                       <a:pPr>
-                        <a:defRPr sz="1200">
+                        <a:defRPr sz="1100">
                           <a:solidFill>
                             <a:srgbClr val="444444"/>
                           </a:solidFill>
                         </a:defRPr>
                       </a:pPr>
                       <a:r>
-                        <a:t>Replanejar cadência comprimida</a:t>
+                        <a:t>Replanejar disparos comprimidos</a:t>
                       </a:r>
                     </a:p>
                   </a:txBody>
@@ -5690,14 +6301,14 @@
                   </a:tcPr>
                 </a:tc>
               </a:tr>
-              <a:tr h="502920">
+              <a:tr h="457200">
                 <a:tc>
                   <a:txBody>
                     <a:bodyPr/>
                     <a:lstStyle/>
                     <a:p>
                       <a:pPr>
-                        <a:defRPr sz="1200">
+                        <a:defRPr sz="1100">
                           <a:solidFill>
                             <a:srgbClr val="444444"/>
                           </a:solidFill>
@@ -5720,7 +6331,7 @@
                     <a:lstStyle/>
                     <a:p>
                       <a:pPr>
-                        <a:defRPr sz="1200">
+                        <a:defRPr sz="1100">
                           <a:solidFill>
                             <a:srgbClr val="444444"/>
                           </a:solidFill>
@@ -5743,7 +6354,7 @@
                     <a:lstStyle/>
                     <a:p>
                       <a:pPr>
-                        <a:defRPr sz="1200">
+                        <a:defRPr sz="1100">
                           <a:solidFill>
                             <a:srgbClr val="444444"/>
                           </a:solidFill>
@@ -5761,14 +6372,14 @@
                   </a:tcPr>
                 </a:tc>
               </a:tr>
-              <a:tr h="502920">
+              <a:tr h="457200">
                 <a:tc>
                   <a:txBody>
                     <a:bodyPr/>
                     <a:lstStyle/>
                     <a:p>
                       <a:pPr>
-                        <a:defRPr sz="1200">
+                        <a:defRPr sz="1100">
                           <a:solidFill>
                             <a:srgbClr val="444444"/>
                           </a:solidFill>
@@ -5791,7 +6402,7 @@
                     <a:lstStyle/>
                     <a:p>
                       <a:pPr>
-                        <a:defRPr sz="1200">
+                        <a:defRPr sz="1100">
                           <a:solidFill>
                             <a:srgbClr val="444444"/>
                           </a:solidFill>
@@ -5814,7 +6425,7 @@
                     <a:lstStyle/>
                     <a:p>
                       <a:pPr>
-                        <a:defRPr sz="1200">
+                        <a:defRPr sz="1100">
                           <a:solidFill>
                             <a:srgbClr val="444444"/>
                           </a:solidFill>
@@ -5832,14 +6443,14 @@
                   </a:tcPr>
                 </a:tc>
               </a:tr>
-              <a:tr h="502920">
+              <a:tr h="457200">
                 <a:tc>
                   <a:txBody>
                     <a:bodyPr/>
                     <a:lstStyle/>
                     <a:p>
                       <a:pPr>
-                        <a:defRPr sz="1200">
+                        <a:defRPr sz="1100">
                           <a:solidFill>
                             <a:srgbClr val="444444"/>
                           </a:solidFill>
@@ -5862,7 +6473,7 @@
                     <a:lstStyle/>
                     <a:p>
                       <a:pPr>
-                        <a:defRPr sz="1200">
+                        <a:defRPr sz="1100">
                           <a:solidFill>
                             <a:srgbClr val="444444"/>
                           </a:solidFill>
@@ -5885,7 +6496,7 @@
                     <a:lstStyle/>
                     <a:p>
                       <a:pPr>
-                        <a:defRPr sz="1200">
+                        <a:defRPr sz="1100">
                           <a:solidFill>
                             <a:srgbClr val="444444"/>
                           </a:solidFill>
@@ -5915,7 +6526,7 @@
 </p:sld>
 </file>
 
-<file path=ppt/slides/slide5.xml><?xml version="1.0" encoding="utf-8"?>
+<file path=ppt/slides/slide6.xml><?xml version="1.0" encoding="utf-8"?>
 <p:sld xmlns:a="http://schemas.openxmlformats.org/drawingml/2006/main" xmlns:p="http://schemas.openxmlformats.org/presentationml/2006/main" xmlns:r="http://schemas.openxmlformats.org/officeDocument/2006/relationships">
   <p:cSld>
     <p:spTree>
@@ -6253,7 +6864,7 @@
                         </a:defRPr>
                       </a:pPr>
                       <a:r>
-                        <a:t>Recepção e networking</a:t>
+                        <a:t>Recepção e networking executivo</a:t>
                       </a:r>
                     </a:p>
                   </a:txBody>
@@ -6347,7 +6958,7 @@
                         </a:defRPr>
                       </a:pPr>
                       <a:r>
-                        <a:t>SAP + Solveplan</a:t>
+                        <a:t>Junior Freitas e Andrey</a:t>
                       </a:r>
                     </a:p>
                   </a:txBody>
@@ -6418,7 +7029,7 @@
                         </a:defRPr>
                       </a:pPr>
                       <a:r>
-                        <a:t>Especialista SAP/Solveplan</a:t>
+                        <a:t>SAP, Andrey e André Ferreira</a:t>
                       </a:r>
                     </a:p>
                   </a:txBody>
@@ -6489,7 +7100,7 @@
                         </a:defRPr>
                       </a:pPr>
                       <a:r>
-                        <a:t>Solveplan + SAP</a:t>
+                        <a:t>Andrey e André Ferreira</a:t>
                       </a:r>
                     </a:p>
                   </a:txBody>
@@ -6514,7 +7125,7 @@
                         </a:defRPr>
                       </a:pPr>
                       <a:r>
-                        <a:t>10h30–10h40</a:t>
+                        <a:t>10min</a:t>
                       </a:r>
                     </a:p>
                   </a:txBody>
@@ -6560,7 +7171,7 @@
                         </a:defRPr>
                       </a:pPr>
                       <a:r>
-                        <a:t>—</a:t>
+                        <a:t>All</a:t>
                       </a:r>
                     </a:p>
                   </a:txBody>
@@ -6608,7 +7219,7 @@
                         </a:defRPr>
                       </a:pPr>
                       <a:r>
-                        <a:t>Case de sucesso</a:t>
+                        <a:t>Case de sucesso SSA</a:t>
                       </a:r>
                     </a:p>
                   </a:txBody>
@@ -6631,7 +7242,7 @@
                         </a:defRPr>
                       </a:pPr>
                       <a:r>
-                        <a:t>Cliente convidado (pendente)</a:t>
+                        <a:t>Rodrigo Dumont (SSA Alimentos)</a:t>
                       </a:r>
                     </a:p>
                   </a:txBody>
@@ -6796,396 +7407,6 @@
 </p:sld>
 </file>
 
-<file path=ppt/slides/slide6.xml><?xml version="1.0" encoding="utf-8"?>
-<p:sld xmlns:a="http://schemas.openxmlformats.org/drawingml/2006/main" xmlns:p="http://schemas.openxmlformats.org/presentationml/2006/main" xmlns:r="http://schemas.openxmlformats.org/officeDocument/2006/relationships">
-  <p:cSld>
-    <p:spTree>
-      <p:nvGrpSpPr>
-        <p:cNvPr id="1" name=""/>
-        <p:cNvGrpSpPr/>
-        <p:nvPr/>
-      </p:nvGrpSpPr>
-      <p:grpSpPr/>
-      <p:sp>
-        <p:nvSpPr>
-          <p:cNvPr id="2" name="Rectangle 1"/>
-          <p:cNvSpPr/>
-          <p:nvPr/>
-        </p:nvSpPr>
-        <p:spPr>
-          <a:xfrm>
-            <a:off x="0" y="0"/>
-            <a:ext cx="12188952" cy="109728"/>
-          </a:xfrm>
-          <a:prstGeom prst="rect">
-            <a:avLst/>
-          </a:prstGeom>
-          <a:solidFill>
-            <a:srgbClr val="F5A800"/>
-          </a:solidFill>
-          <a:ln>
-            <a:noFill/>
-          </a:ln>
-        </p:spPr>
-        <p:style>
-          <a:lnRef idx="1">
-            <a:schemeClr val="accent1"/>
-          </a:lnRef>
-          <a:fillRef idx="3">
-            <a:schemeClr val="accent1"/>
-          </a:fillRef>
-          <a:effectRef idx="2">
-            <a:schemeClr val="accent1"/>
-          </a:effectRef>
-          <a:fontRef idx="minor">
-            <a:schemeClr val="lt1"/>
-          </a:fontRef>
-        </p:style>
-        <p:txBody>
-          <a:bodyPr rtlCol="0" anchor="ctr"/>
-          <a:lstStyle/>
-          <a:p>
-            <a:pPr algn="ctr"/>
-          </a:p>
-        </p:txBody>
-      </p:sp>
-      <p:sp>
-        <p:nvSpPr>
-          <p:cNvPr id="3" name="Rectangle 2"/>
-          <p:cNvSpPr/>
-          <p:nvPr/>
-        </p:nvSpPr>
-        <p:spPr>
-          <a:xfrm>
-            <a:off x="0" y="6748272"/>
-            <a:ext cx="12188952" cy="109728"/>
-          </a:xfrm>
-          <a:prstGeom prst="rect">
-            <a:avLst/>
-          </a:prstGeom>
-          <a:solidFill>
-            <a:srgbClr val="002F6C"/>
-          </a:solidFill>
-          <a:ln>
-            <a:noFill/>
-          </a:ln>
-        </p:spPr>
-        <p:style>
-          <a:lnRef idx="1">
-            <a:schemeClr val="accent1"/>
-          </a:lnRef>
-          <a:fillRef idx="3">
-            <a:schemeClr val="accent1"/>
-          </a:fillRef>
-          <a:effectRef idx="2">
-            <a:schemeClr val="accent1"/>
-          </a:effectRef>
-          <a:fontRef idx="minor">
-            <a:schemeClr val="lt1"/>
-          </a:fontRef>
-        </p:style>
-        <p:txBody>
-          <a:bodyPr rtlCol="0" anchor="ctr"/>
-          <a:lstStyle/>
-          <a:p>
-            <a:pPr algn="ctr"/>
-          </a:p>
-        </p:txBody>
-      </p:sp>
-      <p:sp>
-        <p:nvSpPr>
-          <p:cNvPr id="4" name="TextBox 3"/>
-          <p:cNvSpPr txBox="1"/>
-          <p:nvPr/>
-        </p:nvSpPr>
-        <p:spPr>
-          <a:xfrm>
-            <a:off x="457200" y="256032"/>
-            <a:ext cx="7315200" cy="365760"/>
-          </a:xfrm>
-          <a:prstGeom prst="rect">
-            <a:avLst/>
-          </a:prstGeom>
-          <a:noFill/>
-        </p:spPr>
-        <p:txBody>
-          <a:bodyPr wrap="square">
-            <a:spAutoFit/>
-          </a:bodyPr>
-          <a:lstStyle/>
-          <a:p>
-            <a:pPr algn="l"/>
-            <a:r>
-              <a:rPr sz="1300" b="1" i="0">
-                <a:solidFill>
-                  <a:srgbClr val="F5A800"/>
-                </a:solidFill>
-              </a:rPr>
-              <a:t>5. POSICIONAMENTO</a:t>
-            </a:r>
-          </a:p>
-        </p:txBody>
-      </p:sp>
-      <p:sp>
-        <p:nvSpPr>
-          <p:cNvPr id="5" name="TextBox 4"/>
-          <p:cNvSpPr txBox="1"/>
-          <p:nvPr/>
-        </p:nvSpPr>
-        <p:spPr>
-          <a:xfrm>
-            <a:off x="457200" y="548640"/>
-            <a:ext cx="9144000" cy="548640"/>
-          </a:xfrm>
-          <a:prstGeom prst="rect">
-            <a:avLst/>
-          </a:prstGeom>
-          <a:noFill/>
-        </p:spPr>
-        <p:txBody>
-          <a:bodyPr wrap="square">
-            <a:spAutoFit/>
-          </a:bodyPr>
-          <a:lstStyle/>
-          <a:p>
-            <a:pPr algn="l"/>
-            <a:r>
-              <a:rPr sz="2400" b="1" i="0">
-                <a:solidFill>
-                  <a:srgbClr val="002F6C"/>
-                </a:solidFill>
-              </a:rPr>
-              <a:t>Mensagem-Chave</a:t>
-            </a:r>
-          </a:p>
-        </p:txBody>
-      </p:sp>
-      <p:sp>
-        <p:nvSpPr>
-          <p:cNvPr id="6" name="Rectangle 5"/>
-          <p:cNvSpPr/>
-          <p:nvPr/>
-        </p:nvSpPr>
-        <p:spPr>
-          <a:xfrm>
-            <a:off x="457200" y="1051560"/>
-            <a:ext cx="2011680" cy="36576"/>
-          </a:xfrm>
-          <a:prstGeom prst="rect">
-            <a:avLst/>
-          </a:prstGeom>
-          <a:solidFill>
-            <a:srgbClr val="F5A800"/>
-          </a:solidFill>
-          <a:ln>
-            <a:noFill/>
-          </a:ln>
-        </p:spPr>
-        <p:style>
-          <a:lnRef idx="1">
-            <a:schemeClr val="accent1"/>
-          </a:lnRef>
-          <a:fillRef idx="3">
-            <a:schemeClr val="accent1"/>
-          </a:fillRef>
-          <a:effectRef idx="2">
-            <a:schemeClr val="accent1"/>
-          </a:effectRef>
-          <a:fontRef idx="minor">
-            <a:schemeClr val="lt1"/>
-          </a:fontRef>
-        </p:style>
-        <p:txBody>
-          <a:bodyPr rtlCol="0" anchor="ctr"/>
-          <a:lstStyle/>
-          <a:p>
-            <a:pPr algn="ctr"/>
-          </a:p>
-        </p:txBody>
-      </p:sp>
-      <p:sp>
-        <p:nvSpPr>
-          <p:cNvPr id="7" name="Rectangle 6"/>
-          <p:cNvSpPr/>
-          <p:nvPr/>
-        </p:nvSpPr>
-        <p:spPr>
-          <a:xfrm>
-            <a:off x="457200" y="1371600"/>
-            <a:ext cx="11247120" cy="1005840"/>
-          </a:xfrm>
-          <a:prstGeom prst="rect">
-            <a:avLst/>
-          </a:prstGeom>
-          <a:solidFill>
-            <a:srgbClr val="002F6C"/>
-          </a:solidFill>
-          <a:ln>
-            <a:noFill/>
-          </a:ln>
-        </p:spPr>
-        <p:style>
-          <a:lnRef idx="1">
-            <a:schemeClr val="accent1"/>
-          </a:lnRef>
-          <a:fillRef idx="3">
-            <a:schemeClr val="accent1"/>
-          </a:fillRef>
-          <a:effectRef idx="2">
-            <a:schemeClr val="accent1"/>
-          </a:effectRef>
-          <a:fontRef idx="minor">
-            <a:schemeClr val="lt1"/>
-          </a:fontRef>
-        </p:style>
-        <p:txBody>
-          <a:bodyPr rtlCol="0" anchor="ctr"/>
-          <a:lstStyle/>
-          <a:p>
-            <a:pPr algn="ctr"/>
-          </a:p>
-        </p:txBody>
-      </p:sp>
-      <p:sp>
-        <p:nvSpPr>
-          <p:cNvPr id="8" name="TextBox 7"/>
-          <p:cNvSpPr txBox="1"/>
-          <p:nvPr/>
-        </p:nvSpPr>
-        <p:spPr>
-          <a:xfrm>
-            <a:off x="731520" y="1600200"/>
-            <a:ext cx="10515600" cy="548640"/>
-          </a:xfrm>
-          <a:prstGeom prst="rect">
-            <a:avLst/>
-          </a:prstGeom>
-          <a:noFill/>
-        </p:spPr>
-        <p:txBody>
-          <a:bodyPr wrap="square">
-            <a:spAutoFit/>
-          </a:bodyPr>
-          <a:lstStyle/>
-          <a:p>
-            <a:pPr algn="ctr"/>
-            <a:r>
-              <a:rPr sz="2000" b="1" i="0">
-                <a:solidFill>
-                  <a:srgbClr val="FFFFFF"/>
-                </a:solidFill>
-              </a:rPr>
-              <a:t>"Sua empresa já tem os dados. O SAP BDC entrega a IA."</a:t>
-            </a:r>
-          </a:p>
-        </p:txBody>
-      </p:sp>
-      <p:sp>
-        <p:nvSpPr>
-          <p:cNvPr id="9" name="TextBox 8"/>
-          <p:cNvSpPr txBox="1"/>
-          <p:nvPr/>
-        </p:nvSpPr>
-        <p:spPr>
-          <a:xfrm>
-            <a:off x="731520" y="2743200"/>
-            <a:ext cx="10058400" cy="2743200"/>
-          </a:xfrm>
-          <a:prstGeom prst="rect">
-            <a:avLst/>
-          </a:prstGeom>
-          <a:noFill/>
-        </p:spPr>
-        <p:txBody>
-          <a:bodyPr wrap="square">
-            <a:spAutoFit/>
-          </a:bodyPr>
-          <a:lstStyle/>
-          <a:p>
-            <a:pPr>
-              <a:lnSpc>
-                <a:spcPct val="115000"/>
-              </a:lnSpc>
-            </a:pPr>
-            <a:r>
-              <a:rPr sz="1500">
-                <a:solidFill>
-                  <a:srgbClr val="444444"/>
-                </a:solidFill>
-              </a:rPr>
-              <a:t>•  Tom: expert/conselheiro, direto, orientado a negócio</a:t>
-            </a:r>
-          </a:p>
-          <a:p>
-            <a:pPr>
-              <a:lnSpc>
-                <a:spcPct val="115000"/>
-              </a:lnSpc>
-            </a:pPr>
-            <a:r>
-              <a:rPr sz="1500">
-                <a:solidFill>
-                  <a:srgbClr val="444444"/>
-                </a:solidFill>
-              </a:rPr>
-              <a:t>•  Não mencionar preço sem qualificação</a:t>
-            </a:r>
-          </a:p>
-          <a:p>
-            <a:pPr>
-              <a:lnSpc>
-                <a:spcPct val="115000"/>
-              </a:lnSpc>
-            </a:pPr>
-            <a:r>
-              <a:rPr sz="1500">
-                <a:solidFill>
-                  <a:srgbClr val="444444"/>
-                </a:solidFill>
-              </a:rPr>
-              <a:t>•  Não comparar com Databricks/Snowflake sem contexto adequado</a:t>
-            </a:r>
-          </a:p>
-          <a:p>
-            <a:pPr>
-              <a:lnSpc>
-                <a:spcPct val="115000"/>
-              </a:lnSpc>
-            </a:pPr>
-            <a:r>
-              <a:rPr sz="1500">
-                <a:solidFill>
-                  <a:srgbClr val="444444"/>
-                </a:solidFill>
-              </a:rPr>
-              <a:t>•  CTA lead: inscrição no evento</a:t>
-            </a:r>
-          </a:p>
-          <a:p>
-            <a:pPr>
-              <a:lnSpc>
-                <a:spcPct val="115000"/>
-              </a:lnSpc>
-            </a:pPr>
-            <a:r>
-              <a:rPr sz="1500">
-                <a:solidFill>
-                  <a:srgbClr val="444444"/>
-                </a:solidFill>
-              </a:rPr>
-              <a:t>•  CTA SQL: diagnóstico gratuito / reunião com especialista</a:t>
-            </a:r>
-          </a:p>
-        </p:txBody>
-      </p:sp>
-    </p:spTree>
-  </p:cSld>
-  <p:clrMapOvr>
-    <a:masterClrMapping/>
-  </p:clrMapOvr>
-</p:sld>
-</file>
-
 <file path=ppt/slides/slide7.xml><?xml version="1.0" encoding="utf-8"?>
 <p:sld xmlns:a="http://schemas.openxmlformats.org/drawingml/2006/main" xmlns:p="http://schemas.openxmlformats.org/presentationml/2006/main" xmlns:r="http://schemas.openxmlformats.org/officeDocument/2006/relationships">
   <p:cSld>
@@ -7311,7 +7532,7 @@
                   <a:srgbClr val="F5A800"/>
                 </a:solidFill>
               </a:rPr>
-              <a:t>6. AÇÃO</a:t>
+              <a:t>5. POSICIONAMENTO</a:t>
             </a:r>
           </a:p>
         </p:txBody>
@@ -7345,7 +7566,7 @@
                   <a:srgbClr val="002F6C"/>
                 </a:solidFill>
               </a:rPr>
-              <a:t>Decisões para Sair Desta Reunião</a:t>
+              <a:t>Mensagem-Chave</a:t>
             </a:r>
           </a:p>
         </p:txBody>
@@ -7395,14 +7616,57 @@
       </p:sp>
       <p:sp>
         <p:nvSpPr>
-          <p:cNvPr id="7" name="TextBox 6"/>
+          <p:cNvPr id="7" name="Rectangle 6"/>
+          <p:cNvSpPr/>
+          <p:nvPr/>
+        </p:nvSpPr>
+        <p:spPr>
+          <a:xfrm>
+            <a:off x="457200" y="1371600"/>
+            <a:ext cx="11247120" cy="1005840"/>
+          </a:xfrm>
+          <a:prstGeom prst="rect">
+            <a:avLst/>
+          </a:prstGeom>
+          <a:solidFill>
+            <a:srgbClr val="002F6C"/>
+          </a:solidFill>
+          <a:ln>
+            <a:noFill/>
+          </a:ln>
+        </p:spPr>
+        <p:style>
+          <a:lnRef idx="1">
+            <a:schemeClr val="accent1"/>
+          </a:lnRef>
+          <a:fillRef idx="3">
+            <a:schemeClr val="accent1"/>
+          </a:fillRef>
+          <a:effectRef idx="2">
+            <a:schemeClr val="accent1"/>
+          </a:effectRef>
+          <a:fontRef idx="minor">
+            <a:schemeClr val="lt1"/>
+          </a:fontRef>
+        </p:style>
+        <p:txBody>
+          <a:bodyPr rtlCol="0" anchor="ctr"/>
+          <a:lstStyle/>
+          <a:p>
+            <a:pPr algn="ctr"/>
+          </a:p>
+        </p:txBody>
+      </p:sp>
+      <p:sp>
+        <p:nvSpPr>
+          <p:cNvPr id="8" name="TextBox 7"/>
           <p:cNvSpPr txBox="1"/>
           <p:nvPr/>
         </p:nvSpPr>
         <p:spPr>
           <a:xfrm>
-            <a:off x="548640" y="1371600"/>
-            <a:ext cx="10972800" cy="4572000"/>
+            <a:off x="731520" y="1600200"/>
+            <a:ext cx="10515600" cy="548640"/>
           </a:xfrm>
           <a:prstGeom prst="rect">
             <a:avLst/>
@@ -7415,9 +7679,43 @@
           </a:bodyPr>
           <a:lstStyle/>
           <a:p>
+            <a:pPr algn="ctr"/>
+            <a:r>
+              <a:rPr sz="2000" b="1" i="0">
+                <a:solidFill>
+                  <a:srgbClr val="FFFFFF"/>
+                </a:solidFill>
+              </a:rPr>
+              <a:t>"Sua empresa já tem os dados. O SAP BDC entrega a IA."</a:t>
+            </a:r>
+          </a:p>
+        </p:txBody>
+      </p:sp>
+      <p:sp>
+        <p:nvSpPr>
+          <p:cNvPr id="9" name="TextBox 8"/>
+          <p:cNvSpPr txBox="1"/>
+          <p:nvPr/>
+        </p:nvSpPr>
+        <p:spPr>
+          <a:xfrm>
+            <a:off x="731520" y="2743200"/>
+            <a:ext cx="10058400" cy="2743200"/>
+          </a:xfrm>
+          <a:prstGeom prst="rect">
+            <a:avLst/>
+          </a:prstGeom>
+          <a:noFill/>
+        </p:spPr>
+        <p:txBody>
+          <a:bodyPr wrap="square">
+            <a:spAutoFit/>
+          </a:bodyPr>
+          <a:lstStyle/>
+          <a:p>
             <a:pPr>
               <a:lnSpc>
-                <a:spcPct val="130000"/>
+                <a:spcPct val="115000"/>
               </a:lnSpc>
             </a:pPr>
             <a:r>
@@ -7426,13 +7724,13 @@
                   <a:srgbClr val="444444"/>
                 </a:solidFill>
               </a:rPr>
-              <a:t>•  Quem fecha a lista de convidados hoje/amanhã</a:t>
+              <a:t>•  Tom: expert/conselheiro, direto, orientado a negócio</a:t>
             </a:r>
           </a:p>
           <a:p>
             <a:pPr>
               <a:lnSpc>
-                <a:spcPct val="130000"/>
+                <a:spcPct val="115000"/>
               </a:lnSpc>
             </a:pPr>
             <a:r>
@@ -7441,13 +7739,13 @@
                   <a:srgbClr val="444444"/>
                 </a:solidFill>
               </a:rPr>
-              <a:t>•  Quem confirma o cliente do case de sucesso — e até quando</a:t>
+              <a:t>•  Não mencionar preço sem qualificação</a:t>
             </a:r>
           </a:p>
           <a:p>
             <a:pPr>
               <a:lnSpc>
-                <a:spcPct val="130000"/>
+                <a:spcPct val="115000"/>
               </a:lnSpc>
             </a:pPr>
             <a:r>
@@ -7456,13 +7754,13 @@
                   <a:srgbClr val="444444"/>
                 </a:solidFill>
               </a:rPr>
-              <a:t>•  Replanejar cadência de e-mails (2–3 disparos comprimidos até 24/08)</a:t>
+              <a:t>•  Não comparar com Databricks/Snowflake sem contexto adequado</a:t>
             </a:r>
           </a:p>
           <a:p>
             <a:pPr>
               <a:lnSpc>
-                <a:spcPct val="130000"/>
+                <a:spcPct val="115000"/>
               </a:lnSpc>
             </a:pPr>
             <a:r>
@@ -7471,13 +7769,13 @@
                   <a:srgbClr val="444444"/>
                 </a:solidFill>
               </a:rPr>
-              <a:t>•  Quem publica os posts atrasados (lançamento + convite 01) esta semana</a:t>
+              <a:t>•  CTA lead: inscrição no evento</a:t>
             </a:r>
           </a:p>
           <a:p>
             <a:pPr>
               <a:lnSpc>
-                <a:spcPct val="130000"/>
+                <a:spcPct val="115000"/>
               </a:lnSpc>
             </a:pPr>
             <a:r>
@@ -7486,52 +7784,7 @@
                   <a:srgbClr val="444444"/>
                 </a:solidFill>
               </a:rPr>
-              <a:t>•  Confirmar se anúncios (LinkedIn/Google) já estão ativos</a:t>
-            </a:r>
-          </a:p>
-          <a:p>
-            <a:pPr>
-              <a:lnSpc>
-                <a:spcPct val="130000"/>
-              </a:lnSpc>
-            </a:pPr>
-            <a:r>
-              <a:rPr sz="1500">
-                <a:solidFill>
-                  <a:srgbClr val="444444"/>
-                </a:solidFill>
-              </a:rPr>
-              <a:t>•  Aprovar custo de brindes (R$ 300)</a:t>
-            </a:r>
-          </a:p>
-          <a:p>
-            <a:pPr>
-              <a:lnSpc>
-                <a:spcPct val="130000"/>
-              </a:lnSpc>
-            </a:pPr>
-            <a:r>
-              <a:rPr sz="1500">
-                <a:solidFill>
-                  <a:srgbClr val="444444"/>
-                </a:solidFill>
-              </a:rPr>
-              <a:t>•  Confirmar apresentador SAP e especialista Solveplan</a:t>
-            </a:r>
-          </a:p>
-          <a:p>
-            <a:pPr>
-              <a:lnSpc>
-                <a:spcPct val="130000"/>
-              </a:lnSpc>
-            </a:pPr>
-            <a:r>
-              <a:rPr sz="1500">
-                <a:solidFill>
-                  <a:srgbClr val="444444"/>
-                </a:solidFill>
-              </a:rPr>
-              <a:t>•  Definir dono de cada frente com prazo até fim desta semana</a:t>
+              <a:t>•  CTA SQL: diagnóstico gratuito / reunião com especialista</a:t>
             </a:r>
           </a:p>
         </p:txBody>
@@ -7669,7 +7922,7 @@
                   <a:srgbClr val="F5A800"/>
                 </a:solidFill>
               </a:rPr>
-              <a:t>7. CHECKLIST</a:t>
+              <a:t>6. AÇÃO</a:t>
             </a:r>
           </a:p>
         </p:txBody>
@@ -7703,7 +7956,7 @@
                   <a:srgbClr val="002F6C"/>
                 </a:solidFill>
               </a:rPr>
-              <a:t>Próximos Passos Imediatos</a:t>
+              <a:t>Decisões para Sair Desta Reunião</a:t>
             </a:r>
           </a:p>
         </p:txBody>
@@ -7784,7 +8037,7 @@
                   <a:srgbClr val="444444"/>
                 </a:solidFill>
               </a:rPr>
-              <a:t>•  Fechar lista de 120 contas/contatos-alvo</a:t>
+              <a:t>•  Reportar número de inscrições até hoje (comparar com meta de 120)</a:t>
             </a:r>
           </a:p>
           <a:p>
@@ -7799,7 +8052,7 @@
                   <a:srgbClr val="444444"/>
                 </a:solidFill>
               </a:rPr>
-              <a:t>•  Confirmar cliente do case de sucesso</a:t>
+              <a:t>•  Fechar lista final de 50/60 convidados</a:t>
             </a:r>
           </a:p>
           <a:p>
@@ -7814,7 +8067,7 @@
                   <a:srgbClr val="444444"/>
                 </a:solidFill>
               </a:rPr>
-              <a:t>•  Disparar e-mail de convite 01 (atrasado) ainda esta semana</a:t>
+              <a:t>•  Alinhar roteiro do case com Rodrigo Dumont (SSA Alimentos)</a:t>
             </a:r>
           </a:p>
           <a:p>
@@ -7829,7 +8082,7 @@
                   <a:srgbClr val="444444"/>
                 </a:solidFill>
               </a:rPr>
-              <a:t>•  Publicar post de lançamento + convite 01 (atrasados)</a:t>
+              <a:t>•  Replanejar cadência de e-mails (disparos comprimidos até 24/08)</a:t>
             </a:r>
           </a:p>
           <a:p>
@@ -7844,7 +8097,7 @@
                   <a:srgbClr val="444444"/>
                 </a:solidFill>
               </a:rPr>
-              <a:t>•  Validar página do evento e formulário ao vivo</a:t>
+              <a:t>•  Quem publica os posts atrasados (lançamento + convite 01) esta semana</a:t>
             </a:r>
           </a:p>
           <a:p>
@@ -7859,7 +8112,7 @@
                   <a:srgbClr val="444444"/>
                 </a:solidFill>
               </a:rPr>
-              <a:t>•  Confirmar campanha de anúncios no ar</a:t>
+              <a:t>•  Confirmar se anúncios (LinkedIn/Google) já estão ativos</a:t>
             </a:r>
           </a:p>
           <a:p>
@@ -7874,7 +8127,7 @@
                   <a:srgbClr val="444444"/>
                 </a:solidFill>
               </a:rPr>
-              <a:t>•  Aprovar budget de brindes</a:t>
+              <a:t>•  Aprovar custo de brindes (R$ 300)</a:t>
             </a:r>
           </a:p>
           <a:p>
@@ -7889,7 +8142,380 @@
                   <a:srgbClr val="444444"/>
                 </a:solidFill>
               </a:rPr>
-              <a:t>•  Confirmar palestrantes (SAP + Solveplan + cliente)</a:t>
+              <a:t>•  Alinhar conteúdo e tempo de fala de Junior Freitas, Andrey e André Ferreira</a:t>
+            </a:r>
+          </a:p>
+        </p:txBody>
+      </p:sp>
+    </p:spTree>
+  </p:cSld>
+  <p:clrMapOvr>
+    <a:masterClrMapping/>
+  </p:clrMapOvr>
+</p:sld>
+</file>
+
+<file path=ppt/slides/slide9.xml><?xml version="1.0" encoding="utf-8"?>
+<p:sld xmlns:a="http://schemas.openxmlformats.org/drawingml/2006/main" xmlns:p="http://schemas.openxmlformats.org/presentationml/2006/main" xmlns:r="http://schemas.openxmlformats.org/officeDocument/2006/relationships">
+  <p:cSld>
+    <p:spTree>
+      <p:nvGrpSpPr>
+        <p:cNvPr id="1" name=""/>
+        <p:cNvGrpSpPr/>
+        <p:nvPr/>
+      </p:nvGrpSpPr>
+      <p:grpSpPr/>
+      <p:sp>
+        <p:nvSpPr>
+          <p:cNvPr id="2" name="Rectangle 1"/>
+          <p:cNvSpPr/>
+          <p:nvPr/>
+        </p:nvSpPr>
+        <p:spPr>
+          <a:xfrm>
+            <a:off x="0" y="0"/>
+            <a:ext cx="12188952" cy="109728"/>
+          </a:xfrm>
+          <a:prstGeom prst="rect">
+            <a:avLst/>
+          </a:prstGeom>
+          <a:solidFill>
+            <a:srgbClr val="F5A800"/>
+          </a:solidFill>
+          <a:ln>
+            <a:noFill/>
+          </a:ln>
+        </p:spPr>
+        <p:style>
+          <a:lnRef idx="1">
+            <a:schemeClr val="accent1"/>
+          </a:lnRef>
+          <a:fillRef idx="3">
+            <a:schemeClr val="accent1"/>
+          </a:fillRef>
+          <a:effectRef idx="2">
+            <a:schemeClr val="accent1"/>
+          </a:effectRef>
+          <a:fontRef idx="minor">
+            <a:schemeClr val="lt1"/>
+          </a:fontRef>
+        </p:style>
+        <p:txBody>
+          <a:bodyPr rtlCol="0" anchor="ctr"/>
+          <a:lstStyle/>
+          <a:p>
+            <a:pPr algn="ctr"/>
+          </a:p>
+        </p:txBody>
+      </p:sp>
+      <p:sp>
+        <p:nvSpPr>
+          <p:cNvPr id="3" name="Rectangle 2"/>
+          <p:cNvSpPr/>
+          <p:nvPr/>
+        </p:nvSpPr>
+        <p:spPr>
+          <a:xfrm>
+            <a:off x="0" y="6748272"/>
+            <a:ext cx="12188952" cy="109728"/>
+          </a:xfrm>
+          <a:prstGeom prst="rect">
+            <a:avLst/>
+          </a:prstGeom>
+          <a:solidFill>
+            <a:srgbClr val="002F6C"/>
+          </a:solidFill>
+          <a:ln>
+            <a:noFill/>
+          </a:ln>
+        </p:spPr>
+        <p:style>
+          <a:lnRef idx="1">
+            <a:schemeClr val="accent1"/>
+          </a:lnRef>
+          <a:fillRef idx="3">
+            <a:schemeClr val="accent1"/>
+          </a:fillRef>
+          <a:effectRef idx="2">
+            <a:schemeClr val="accent1"/>
+          </a:effectRef>
+          <a:fontRef idx="minor">
+            <a:schemeClr val="lt1"/>
+          </a:fontRef>
+        </p:style>
+        <p:txBody>
+          <a:bodyPr rtlCol="0" anchor="ctr"/>
+          <a:lstStyle/>
+          <a:p>
+            <a:pPr algn="ctr"/>
+          </a:p>
+        </p:txBody>
+      </p:sp>
+      <p:sp>
+        <p:nvSpPr>
+          <p:cNvPr id="4" name="TextBox 3"/>
+          <p:cNvSpPr txBox="1"/>
+          <p:nvPr/>
+        </p:nvSpPr>
+        <p:spPr>
+          <a:xfrm>
+            <a:off x="457200" y="256032"/>
+            <a:ext cx="7315200" cy="365760"/>
+          </a:xfrm>
+          <a:prstGeom prst="rect">
+            <a:avLst/>
+          </a:prstGeom>
+          <a:noFill/>
+        </p:spPr>
+        <p:txBody>
+          <a:bodyPr wrap="square">
+            <a:spAutoFit/>
+          </a:bodyPr>
+          <a:lstStyle/>
+          <a:p>
+            <a:pPr algn="l"/>
+            <a:r>
+              <a:rPr sz="1300" b="1" i="0">
+                <a:solidFill>
+                  <a:srgbClr val="F5A800"/>
+                </a:solidFill>
+              </a:rPr>
+              <a:t>7. CHECKLIST</a:t>
+            </a:r>
+          </a:p>
+        </p:txBody>
+      </p:sp>
+      <p:sp>
+        <p:nvSpPr>
+          <p:cNvPr id="5" name="TextBox 4"/>
+          <p:cNvSpPr txBox="1"/>
+          <p:nvPr/>
+        </p:nvSpPr>
+        <p:spPr>
+          <a:xfrm>
+            <a:off x="457200" y="548640"/>
+            <a:ext cx="9144000" cy="548640"/>
+          </a:xfrm>
+          <a:prstGeom prst="rect">
+            <a:avLst/>
+          </a:prstGeom>
+          <a:noFill/>
+        </p:spPr>
+        <p:txBody>
+          <a:bodyPr wrap="square">
+            <a:spAutoFit/>
+          </a:bodyPr>
+          <a:lstStyle/>
+          <a:p>
+            <a:pPr algn="l"/>
+            <a:r>
+              <a:rPr sz="2400" b="1" i="0">
+                <a:solidFill>
+                  <a:srgbClr val="002F6C"/>
+                </a:solidFill>
+              </a:rPr>
+              <a:t>Próximos Passos Imediatos</a:t>
+            </a:r>
+          </a:p>
+        </p:txBody>
+      </p:sp>
+      <p:sp>
+        <p:nvSpPr>
+          <p:cNvPr id="6" name="Rectangle 5"/>
+          <p:cNvSpPr/>
+          <p:nvPr/>
+        </p:nvSpPr>
+        <p:spPr>
+          <a:xfrm>
+            <a:off x="457200" y="1051560"/>
+            <a:ext cx="2011680" cy="36576"/>
+          </a:xfrm>
+          <a:prstGeom prst="rect">
+            <a:avLst/>
+          </a:prstGeom>
+          <a:solidFill>
+            <a:srgbClr val="F5A800"/>
+          </a:solidFill>
+          <a:ln>
+            <a:noFill/>
+          </a:ln>
+        </p:spPr>
+        <p:style>
+          <a:lnRef idx="1">
+            <a:schemeClr val="accent1"/>
+          </a:lnRef>
+          <a:fillRef idx="3">
+            <a:schemeClr val="accent1"/>
+          </a:fillRef>
+          <a:effectRef idx="2">
+            <a:schemeClr val="accent1"/>
+          </a:effectRef>
+          <a:fontRef idx="minor">
+            <a:schemeClr val="lt1"/>
+          </a:fontRef>
+        </p:style>
+        <p:txBody>
+          <a:bodyPr rtlCol="0" anchor="ctr"/>
+          <a:lstStyle/>
+          <a:p>
+            <a:pPr algn="ctr"/>
+          </a:p>
+        </p:txBody>
+      </p:sp>
+      <p:sp>
+        <p:nvSpPr>
+          <p:cNvPr id="7" name="TextBox 6"/>
+          <p:cNvSpPr txBox="1"/>
+          <p:nvPr/>
+        </p:nvSpPr>
+        <p:spPr>
+          <a:xfrm>
+            <a:off x="548640" y="1371600"/>
+            <a:ext cx="10972800" cy="4572000"/>
+          </a:xfrm>
+          <a:prstGeom prst="rect">
+            <a:avLst/>
+          </a:prstGeom>
+          <a:noFill/>
+        </p:spPr>
+        <p:txBody>
+          <a:bodyPr wrap="square">
+            <a:spAutoFit/>
+          </a:bodyPr>
+          <a:lstStyle/>
+          <a:p>
+            <a:pPr>
+              <a:lnSpc>
+                <a:spcPct val="130000"/>
+              </a:lnSpc>
+            </a:pPr>
+            <a:r>
+              <a:rPr sz="1500">
+                <a:solidFill>
+                  <a:srgbClr val="444444"/>
+                </a:solidFill>
+              </a:rPr>
+              <a:t>•  Reportar número de inscrições atuais</a:t>
+            </a:r>
+          </a:p>
+          <a:p>
+            <a:pPr>
+              <a:lnSpc>
+                <a:spcPct val="130000"/>
+              </a:lnSpc>
+            </a:pPr>
+            <a:r>
+              <a:rPr sz="1500">
+                <a:solidFill>
+                  <a:srgbClr val="444444"/>
+                </a:solidFill>
+              </a:rPr>
+              <a:t>•  Fechar lista final de convidados (50/60)</a:t>
+            </a:r>
+          </a:p>
+          <a:p>
+            <a:pPr>
+              <a:lnSpc>
+                <a:spcPct val="130000"/>
+              </a:lnSpc>
+            </a:pPr>
+            <a:r>
+              <a:rPr sz="1500">
+                <a:solidFill>
+                  <a:srgbClr val="444444"/>
+                </a:solidFill>
+              </a:rPr>
+              <a:t>•  Alinhar roteiro do case com Rodrigo Dumont</a:t>
+            </a:r>
+          </a:p>
+          <a:p>
+            <a:pPr>
+              <a:lnSpc>
+                <a:spcPct val="130000"/>
+              </a:lnSpc>
+            </a:pPr>
+            <a:r>
+              <a:rPr sz="1500">
+                <a:solidFill>
+                  <a:srgbClr val="444444"/>
+                </a:solidFill>
+              </a:rPr>
+              <a:t>•  Disparar e-mail de convite (comprimido) ainda esta semana</a:t>
+            </a:r>
+          </a:p>
+          <a:p>
+            <a:pPr>
+              <a:lnSpc>
+                <a:spcPct val="130000"/>
+              </a:lnSpc>
+            </a:pPr>
+            <a:r>
+              <a:rPr sz="1500">
+                <a:solidFill>
+                  <a:srgbClr val="444444"/>
+                </a:solidFill>
+              </a:rPr>
+              <a:t>•  Publicar post de lançamento + convite 01 (atrasados)</a:t>
+            </a:r>
+          </a:p>
+          <a:p>
+            <a:pPr>
+              <a:lnSpc>
+                <a:spcPct val="130000"/>
+              </a:lnSpc>
+            </a:pPr>
+            <a:r>
+              <a:rPr sz="1500">
+                <a:solidFill>
+                  <a:srgbClr val="444444"/>
+                </a:solidFill>
+              </a:rPr>
+              <a:t>•  Validar página do evento e formulário ao vivo</a:t>
+            </a:r>
+          </a:p>
+          <a:p>
+            <a:pPr>
+              <a:lnSpc>
+                <a:spcPct val="130000"/>
+              </a:lnSpc>
+            </a:pPr>
+            <a:r>
+              <a:rPr sz="1500">
+                <a:solidFill>
+                  <a:srgbClr val="444444"/>
+                </a:solidFill>
+              </a:rPr>
+              <a:t>•  Confirmar campanha de anúncios no ar</a:t>
+            </a:r>
+          </a:p>
+          <a:p>
+            <a:pPr>
+              <a:lnSpc>
+                <a:spcPct val="130000"/>
+              </a:lnSpc>
+            </a:pPr>
+            <a:r>
+              <a:rPr sz="1500">
+                <a:solidFill>
+                  <a:srgbClr val="444444"/>
+                </a:solidFill>
+              </a:rPr>
+              <a:t>•  Aprovar budget de brindes</a:t>
+            </a:r>
+          </a:p>
+          <a:p>
+            <a:pPr>
+              <a:lnSpc>
+                <a:spcPct val="130000"/>
+              </a:lnSpc>
+            </a:pPr>
+            <a:r>
+              <a:rPr sz="1500">
+                <a:solidFill>
+                  <a:srgbClr val="444444"/>
+                </a:solidFill>
+              </a:rPr>
+              <a:t>•  Alinhar apresentação com os 3 palestrantes internos</a:t>
             </a:r>
           </a:p>
         </p:txBody>
